--- a/CalendarioAgo26/presentaciones/6_For.pptx
+++ b/CalendarioAgo26/presentaciones/6_For.pptx
@@ -140,6 +140,43 @@
 </p:presentation>
 </file>
 
+<file path=ppt/revisionInfo.xml><?xml version="1.0" encoding="utf-8"?>
+<p1510:revInfo xmlns:a="http://schemas.openxmlformats.org/drawingml/2006/main" xmlns:r="http://schemas.openxmlformats.org/officeDocument/2006/relationships" xmlns:p1510="http://schemas.microsoft.com/office/powerpoint/2015/10/main">
+  <p1510:revLst>
+    <p1510:client id="{00A4063D-488E-4477-8DDB-11805C0E27FE}" v="1" dt="2026-08-11T16:39:24.112"/>
+  </p1510:revLst>
+</p1510:revInfo>
+</file>
+
+<file path=ppt/changesInfos/changesInfo1.xml><?xml version="1.0" encoding="utf-8"?>
+<pc:chgInfo xmlns:a="http://schemas.openxmlformats.org/drawingml/2006/main" xmlns:r="http://schemas.openxmlformats.org/officeDocument/2006/relationships" xmlns:ac="http://schemas.microsoft.com/office/drawing/2013/main/command" xmlns:pc="http://schemas.microsoft.com/office/powerpoint/2013/main/command">
+  <pc:docChgLst>
+    <pc:chgData name="Lizethe Pérez Fuertes" userId="4ae9ef87-2a7d-42f8-8dfa-0a501a9e2ff4" providerId="ADAL" clId="{FDDD45CB-1330-4033-A842-3D2746AFF7C7}"/>
+    <pc:docChg chg="modSld">
+      <pc:chgData name="Lizethe Pérez Fuertes" userId="4ae9ef87-2a7d-42f8-8dfa-0a501a9e2ff4" providerId="ADAL" clId="{FDDD45CB-1330-4033-A842-3D2746AFF7C7}" dt="2026-08-11T16:39:24.112" v="0"/>
+      <pc:docMkLst>
+        <pc:docMk/>
+      </pc:docMkLst>
+      <pc:sldChg chg="modSp">
+        <pc:chgData name="Lizethe Pérez Fuertes" userId="4ae9ef87-2a7d-42f8-8dfa-0a501a9e2ff4" providerId="ADAL" clId="{FDDD45CB-1330-4033-A842-3D2746AFF7C7}" dt="2026-08-11T16:39:24.112" v="0"/>
+        <pc:sldMkLst>
+          <pc:docMk/>
+          <pc:sldMk cId="2553855534" sldId="289"/>
+        </pc:sldMkLst>
+        <pc:spChg chg="mod">
+          <ac:chgData name="Lizethe Pérez Fuertes" userId="4ae9ef87-2a7d-42f8-8dfa-0a501a9e2ff4" providerId="ADAL" clId="{FDDD45CB-1330-4033-A842-3D2746AFF7C7}" dt="2026-08-11T16:39:24.112" v="0"/>
+          <ac:spMkLst>
+            <pc:docMk/>
+            <pc:sldMk cId="2553855534" sldId="289"/>
+            <ac:spMk id="8" creationId="{024DF2E8-2018-4ED1-AEE2-3CDDE9EA9766}"/>
+          </ac:spMkLst>
+        </pc:spChg>
+      </pc:sldChg>
+    </pc:docChg>
+  </pc:docChgLst>
+</pc:chgInfo>
+</file>
+
 <file path=ppt/notesMasters/notesMaster1.xml><?xml version="1.0" encoding="utf-8"?>
 <p:notesMaster xmlns:a="http://schemas.openxmlformats.org/drawingml/2006/main" xmlns:r="http://schemas.openxmlformats.org/officeDocument/2006/relationships" xmlns:p="http://schemas.openxmlformats.org/presentationml/2006/main">
   <p:cSld>
@@ -222,7 +259,7 @@
           <a:p>
             <a:fld id="{6850521A-C27A-4838-9C91-787748A77EFD}" type="datetimeFigureOut">
               <a:rPr lang="es-MX" smtClean="0"/>
-              <a:t>10/08/2022</a:t>
+              <a:t>11/08/2026</a:t>
             </a:fld>
             <a:endParaRPr lang="es-MX"/>
           </a:p>
@@ -1595,7 +1632,7 @@
           <a:p>
             <a:fld id="{25BC5239-EFEC-4EF5-AB4E-B8ED16D8832D}" type="datetimeFigureOut">
               <a:rPr lang="es-MX" smtClean="0"/>
-              <a:t>10/08/2022</a:t>
+              <a:t>11/08/2026</a:t>
             </a:fld>
             <a:endParaRPr lang="es-MX"/>
           </a:p>
@@ -1765,7 +1802,7 @@
           <a:p>
             <a:fld id="{25BC5239-EFEC-4EF5-AB4E-B8ED16D8832D}" type="datetimeFigureOut">
               <a:rPr lang="es-MX" smtClean="0"/>
-              <a:t>10/08/2022</a:t>
+              <a:t>11/08/2026</a:t>
             </a:fld>
             <a:endParaRPr lang="es-MX"/>
           </a:p>
@@ -1945,7 +1982,7 @@
           <a:p>
             <a:fld id="{25BC5239-EFEC-4EF5-AB4E-B8ED16D8832D}" type="datetimeFigureOut">
               <a:rPr lang="es-MX" smtClean="0"/>
-              <a:t>10/08/2022</a:t>
+              <a:t>11/08/2026</a:t>
             </a:fld>
             <a:endParaRPr lang="es-MX"/>
           </a:p>
@@ -2098,7 +2135,7 @@
           <a:p>
             <a:fld id="{1D8BD707-D9CF-40AE-B4C6-C98DA3205C09}" type="datetimeFigureOut">
               <a:rPr lang="en-US" smtClean="0"/>
-              <a:t>8/10/2022</a:t>
+              <a:t>8/11/2026</a:t>
             </a:fld>
             <a:endParaRPr lang="en-US"/>
           </a:p>
@@ -2258,7 +2295,7 @@
           <a:p>
             <a:fld id="{25BC5239-EFEC-4EF5-AB4E-B8ED16D8832D}" type="datetimeFigureOut">
               <a:rPr lang="es-MX" smtClean="0"/>
-              <a:t>10/08/2022</a:t>
+              <a:t>11/08/2026</a:t>
             </a:fld>
             <a:endParaRPr lang="es-MX"/>
           </a:p>
@@ -2504,7 +2541,7 @@
           <a:p>
             <a:fld id="{25BC5239-EFEC-4EF5-AB4E-B8ED16D8832D}" type="datetimeFigureOut">
               <a:rPr lang="es-MX" smtClean="0"/>
-              <a:t>10/08/2022</a:t>
+              <a:t>11/08/2026</a:t>
             </a:fld>
             <a:endParaRPr lang="es-MX"/>
           </a:p>
@@ -2792,7 +2829,7 @@
           <a:p>
             <a:fld id="{25BC5239-EFEC-4EF5-AB4E-B8ED16D8832D}" type="datetimeFigureOut">
               <a:rPr lang="es-MX" smtClean="0"/>
-              <a:t>10/08/2022</a:t>
+              <a:t>11/08/2026</a:t>
             </a:fld>
             <a:endParaRPr lang="es-MX"/>
           </a:p>
@@ -3214,7 +3251,7 @@
           <a:p>
             <a:fld id="{25BC5239-EFEC-4EF5-AB4E-B8ED16D8832D}" type="datetimeFigureOut">
               <a:rPr lang="es-MX" smtClean="0"/>
-              <a:t>10/08/2022</a:t>
+              <a:t>11/08/2026</a:t>
             </a:fld>
             <a:endParaRPr lang="es-MX"/>
           </a:p>
@@ -3332,7 +3369,7 @@
           <a:p>
             <a:fld id="{25BC5239-EFEC-4EF5-AB4E-B8ED16D8832D}" type="datetimeFigureOut">
               <a:rPr lang="es-MX" smtClean="0"/>
-              <a:t>10/08/2022</a:t>
+              <a:t>11/08/2026</a:t>
             </a:fld>
             <a:endParaRPr lang="es-MX"/>
           </a:p>
@@ -3427,7 +3464,7 @@
           <a:p>
             <a:fld id="{25BC5239-EFEC-4EF5-AB4E-B8ED16D8832D}" type="datetimeFigureOut">
               <a:rPr lang="es-MX" smtClean="0"/>
-              <a:t>10/08/2022</a:t>
+              <a:t>11/08/2026</a:t>
             </a:fld>
             <a:endParaRPr lang="es-MX"/>
           </a:p>
@@ -3704,7 +3741,7 @@
           <a:p>
             <a:fld id="{25BC5239-EFEC-4EF5-AB4E-B8ED16D8832D}" type="datetimeFigureOut">
               <a:rPr lang="es-MX" smtClean="0"/>
-              <a:t>10/08/2022</a:t>
+              <a:t>11/08/2026</a:t>
             </a:fld>
             <a:endParaRPr lang="es-MX"/>
           </a:p>
@@ -3957,7 +3994,7 @@
           <a:p>
             <a:fld id="{25BC5239-EFEC-4EF5-AB4E-B8ED16D8832D}" type="datetimeFigureOut">
               <a:rPr lang="es-MX" smtClean="0"/>
-              <a:t>10/08/2022</a:t>
+              <a:t>11/08/2026</a:t>
             </a:fld>
             <a:endParaRPr lang="es-MX"/>
           </a:p>
@@ -4170,7 +4207,7 @@
           <a:p>
             <a:fld id="{25BC5239-EFEC-4EF5-AB4E-B8ED16D8832D}" type="datetimeFigureOut">
               <a:rPr lang="es-MX" smtClean="0"/>
-              <a:t>10/08/2022</a:t>
+              <a:t>11/08/2026</a:t>
             </a:fld>
             <a:endParaRPr lang="es-MX"/>
           </a:p>
@@ -4699,14 +4736,14 @@
               <a:defRPr/>
             </a:pPr>
             <a:r>
-              <a:rPr lang="es-MX" sz="3200" dirty="0">
+              <a:rPr lang="es-MX" sz="3200">
                 <a:solidFill>
                   <a:schemeClr val="bg2">
                     <a:lumMod val="50000"/>
                   </a:schemeClr>
                 </a:solidFill>
               </a:rPr>
-              <a:t>TC 3001 C </a:t>
+              <a:t>TI 3008 C</a:t>
             </a:r>
             <a:br>
               <a:rPr lang="es-MX" sz="3200" dirty="0">
